--- a/我要順服(崇拜版).pptx
+++ b/我要順服(崇拜版).pptx
@@ -5,9 +5,13 @@
     <p:sldMasterId id="2147483660" r:id="rId1"/>
   </p:sldMasterIdLst>
   <p:sldIdLst>
-    <p:sldId id="256" r:id="rId2"/>
-    <p:sldId id="259" r:id="rId3"/>
-    <p:sldId id="260" r:id="rId4"/>
+    <p:sldId id="262" r:id="rId2"/>
+    <p:sldId id="263" r:id="rId3"/>
+    <p:sldId id="264" r:id="rId4"/>
+    <p:sldId id="265" r:id="rId5"/>
+    <p:sldId id="266" r:id="rId6"/>
+    <p:sldId id="267" r:id="rId7"/>
+    <p:sldId id="268" r:id="rId8"/>
   </p:sldIdLst>
   <p:sldSz cx="12192000" cy="6858000"/>
   <p:notesSz cx="6858000" cy="9144000"/>
@@ -163,10 +167,9 @@
           <a:lstStyle/>
           <a:p>
             <a:r>
-              <a:rPr lang="zh-TW" altLang="en-US" smtClean="0"/>
+              <a:rPr lang="zh-TW" altLang="en-US"/>
               <a:t>按一下以編輯母片標題樣式</a:t>
             </a:r>
-            <a:endParaRPr lang="zh-TW" altLang="en-US"/>
           </a:p>
         </p:txBody>
       </p:sp>
@@ -282,10 +285,9 @@
           </a:lstStyle>
           <a:p>
             <a:r>
-              <a:rPr lang="zh-TW" altLang="en-US" smtClean="0"/>
+              <a:rPr lang="zh-TW" altLang="en-US"/>
               <a:t>按一下以編輯母片副標題樣式</a:t>
             </a:r>
-            <a:endParaRPr lang="zh-TW" altLang="en-US"/>
           </a:p>
         </p:txBody>
       </p:sp>
@@ -307,7 +309,7 @@
             <a:fld id="{9C0041D8-0984-4F5E-821F-46606E2FF9E0}" type="datetimeFigureOut">
               <a:rPr lang="zh-TW" altLang="en-US" smtClean="0"/>
               <a:pPr/>
-              <a:t>2020/1/18</a:t>
+              <a:t>2024/10/1</a:t>
             </a:fld>
             <a:endParaRPr lang="zh-TW" altLang="en-US"/>
           </a:p>
@@ -397,10 +399,9 @@
           <a:lstStyle/>
           <a:p>
             <a:r>
-              <a:rPr lang="zh-TW" altLang="en-US" smtClean="0"/>
+              <a:rPr lang="zh-TW" altLang="en-US"/>
               <a:t>按一下以編輯母片標題樣式</a:t>
             </a:r>
-            <a:endParaRPr lang="zh-TW" altLang="en-US"/>
           </a:p>
         </p:txBody>
       </p:sp>
@@ -421,38 +422,37 @@
           <a:p>
             <a:pPr lvl="0"/>
             <a:r>
-              <a:rPr lang="zh-TW" altLang="en-US" smtClean="0"/>
+              <a:rPr lang="zh-TW" altLang="en-US"/>
               <a:t>按一下以編輯母片文字樣式</a:t>
             </a:r>
           </a:p>
           <a:p>
             <a:pPr lvl="1"/>
             <a:r>
-              <a:rPr lang="zh-TW" altLang="en-US" smtClean="0"/>
+              <a:rPr lang="zh-TW" altLang="en-US"/>
               <a:t>第二層</a:t>
             </a:r>
           </a:p>
           <a:p>
             <a:pPr lvl="2"/>
             <a:r>
-              <a:rPr lang="zh-TW" altLang="en-US" smtClean="0"/>
+              <a:rPr lang="zh-TW" altLang="en-US"/>
               <a:t>第三層</a:t>
             </a:r>
           </a:p>
           <a:p>
             <a:pPr lvl="3"/>
             <a:r>
-              <a:rPr lang="zh-TW" altLang="en-US" smtClean="0"/>
+              <a:rPr lang="zh-TW" altLang="en-US"/>
               <a:t>第四層</a:t>
             </a:r>
           </a:p>
           <a:p>
             <a:pPr lvl="4"/>
             <a:r>
-              <a:rPr lang="zh-TW" altLang="en-US" smtClean="0"/>
+              <a:rPr lang="zh-TW" altLang="en-US"/>
               <a:t>第五層</a:t>
             </a:r>
-            <a:endParaRPr lang="zh-TW" altLang="en-US"/>
           </a:p>
         </p:txBody>
       </p:sp>
@@ -474,7 +474,7 @@
             <a:fld id="{9C0041D8-0984-4F5E-821F-46606E2FF9E0}" type="datetimeFigureOut">
               <a:rPr lang="zh-TW" altLang="en-US" smtClean="0"/>
               <a:pPr/>
-              <a:t>2020/1/18</a:t>
+              <a:t>2024/10/1</a:t>
             </a:fld>
             <a:endParaRPr lang="zh-TW" altLang="en-US"/>
           </a:p>
@@ -569,10 +569,9 @@
           <a:lstStyle/>
           <a:p>
             <a:r>
-              <a:rPr lang="zh-TW" altLang="en-US" smtClean="0"/>
+              <a:rPr lang="zh-TW" altLang="en-US"/>
               <a:t>按一下以編輯母片標題樣式</a:t>
             </a:r>
-            <a:endParaRPr lang="zh-TW" altLang="en-US"/>
           </a:p>
         </p:txBody>
       </p:sp>
@@ -598,38 +597,37 @@
           <a:p>
             <a:pPr lvl="0"/>
             <a:r>
-              <a:rPr lang="zh-TW" altLang="en-US" smtClean="0"/>
+              <a:rPr lang="zh-TW" altLang="en-US"/>
               <a:t>按一下以編輯母片文字樣式</a:t>
             </a:r>
           </a:p>
           <a:p>
             <a:pPr lvl="1"/>
             <a:r>
-              <a:rPr lang="zh-TW" altLang="en-US" smtClean="0"/>
+              <a:rPr lang="zh-TW" altLang="en-US"/>
               <a:t>第二層</a:t>
             </a:r>
           </a:p>
           <a:p>
             <a:pPr lvl="2"/>
             <a:r>
-              <a:rPr lang="zh-TW" altLang="en-US" smtClean="0"/>
+              <a:rPr lang="zh-TW" altLang="en-US"/>
               <a:t>第三層</a:t>
             </a:r>
           </a:p>
           <a:p>
             <a:pPr lvl="3"/>
             <a:r>
-              <a:rPr lang="zh-TW" altLang="en-US" smtClean="0"/>
+              <a:rPr lang="zh-TW" altLang="en-US"/>
               <a:t>第四層</a:t>
             </a:r>
           </a:p>
           <a:p>
             <a:pPr lvl="4"/>
             <a:r>
-              <a:rPr lang="zh-TW" altLang="en-US" smtClean="0"/>
+              <a:rPr lang="zh-TW" altLang="en-US"/>
               <a:t>第五層</a:t>
             </a:r>
-            <a:endParaRPr lang="zh-TW" altLang="en-US"/>
           </a:p>
         </p:txBody>
       </p:sp>
@@ -651,7 +649,7 @@
             <a:fld id="{9C0041D8-0984-4F5E-821F-46606E2FF9E0}" type="datetimeFigureOut">
               <a:rPr lang="zh-TW" altLang="en-US" smtClean="0"/>
               <a:pPr/>
-              <a:t>2020/1/18</a:t>
+              <a:t>2024/10/1</a:t>
             </a:fld>
             <a:endParaRPr lang="zh-TW" altLang="en-US"/>
           </a:p>
@@ -741,10 +739,9 @@
           <a:lstStyle/>
           <a:p>
             <a:r>
-              <a:rPr lang="zh-TW" altLang="en-US" smtClean="0"/>
+              <a:rPr lang="zh-TW" altLang="en-US"/>
               <a:t>按一下以編輯母片標題樣式</a:t>
             </a:r>
-            <a:endParaRPr lang="zh-TW" altLang="en-US"/>
           </a:p>
         </p:txBody>
       </p:sp>
@@ -765,38 +762,37 @@
           <a:p>
             <a:pPr lvl="0"/>
             <a:r>
-              <a:rPr lang="zh-TW" altLang="en-US" smtClean="0"/>
+              <a:rPr lang="zh-TW" altLang="en-US"/>
               <a:t>按一下以編輯母片文字樣式</a:t>
             </a:r>
           </a:p>
           <a:p>
             <a:pPr lvl="1"/>
             <a:r>
-              <a:rPr lang="zh-TW" altLang="en-US" smtClean="0"/>
+              <a:rPr lang="zh-TW" altLang="en-US"/>
               <a:t>第二層</a:t>
             </a:r>
           </a:p>
           <a:p>
             <a:pPr lvl="2"/>
             <a:r>
-              <a:rPr lang="zh-TW" altLang="en-US" smtClean="0"/>
+              <a:rPr lang="zh-TW" altLang="en-US"/>
               <a:t>第三層</a:t>
             </a:r>
           </a:p>
           <a:p>
             <a:pPr lvl="3"/>
             <a:r>
-              <a:rPr lang="zh-TW" altLang="en-US" smtClean="0"/>
+              <a:rPr lang="zh-TW" altLang="en-US"/>
               <a:t>第四層</a:t>
             </a:r>
           </a:p>
           <a:p>
             <a:pPr lvl="4"/>
             <a:r>
-              <a:rPr lang="zh-TW" altLang="en-US" smtClean="0"/>
+              <a:rPr lang="zh-TW" altLang="en-US"/>
               <a:t>第五層</a:t>
             </a:r>
-            <a:endParaRPr lang="zh-TW" altLang="en-US"/>
           </a:p>
         </p:txBody>
       </p:sp>
@@ -818,7 +814,7 @@
             <a:fld id="{9C0041D8-0984-4F5E-821F-46606E2FF9E0}" type="datetimeFigureOut">
               <a:rPr lang="zh-TW" altLang="en-US" smtClean="0"/>
               <a:pPr/>
-              <a:t>2020/1/18</a:t>
+              <a:t>2024/10/1</a:t>
             </a:fld>
             <a:endParaRPr lang="zh-TW" altLang="en-US"/>
           </a:p>
@@ -917,10 +913,9 @@
           </a:lstStyle>
           <a:p>
             <a:r>
-              <a:rPr lang="zh-TW" altLang="en-US" smtClean="0"/>
+              <a:rPr lang="zh-TW" altLang="en-US"/>
               <a:t>按一下以編輯母片標題樣式</a:t>
             </a:r>
-            <a:endParaRPr lang="zh-TW" altLang="en-US"/>
           </a:p>
         </p:txBody>
       </p:sp>
@@ -1037,7 +1032,7 @@
           <a:p>
             <a:pPr lvl="0"/>
             <a:r>
-              <a:rPr lang="zh-TW" altLang="en-US" smtClean="0"/>
+              <a:rPr lang="zh-TW" altLang="en-US"/>
               <a:t>按一下以編輯母片文字樣式</a:t>
             </a:r>
           </a:p>
@@ -1061,7 +1056,7 @@
             <a:fld id="{9C0041D8-0984-4F5E-821F-46606E2FF9E0}" type="datetimeFigureOut">
               <a:rPr lang="zh-TW" altLang="en-US" smtClean="0"/>
               <a:pPr/>
-              <a:t>2020/1/18</a:t>
+              <a:t>2024/10/1</a:t>
             </a:fld>
             <a:endParaRPr lang="zh-TW" altLang="en-US"/>
           </a:p>
@@ -1151,10 +1146,9 @@
           <a:lstStyle/>
           <a:p>
             <a:r>
-              <a:rPr lang="zh-TW" altLang="en-US" smtClean="0"/>
+              <a:rPr lang="zh-TW" altLang="en-US"/>
               <a:t>按一下以編輯母片標題樣式</a:t>
             </a:r>
-            <a:endParaRPr lang="zh-TW" altLang="en-US"/>
           </a:p>
         </p:txBody>
       </p:sp>
@@ -1208,38 +1202,37 @@
           <a:p>
             <a:pPr lvl="0"/>
             <a:r>
-              <a:rPr lang="zh-TW" altLang="en-US" smtClean="0"/>
+              <a:rPr lang="zh-TW" altLang="en-US"/>
               <a:t>按一下以編輯母片文字樣式</a:t>
             </a:r>
           </a:p>
           <a:p>
             <a:pPr lvl="1"/>
             <a:r>
-              <a:rPr lang="zh-TW" altLang="en-US" smtClean="0"/>
+              <a:rPr lang="zh-TW" altLang="en-US"/>
               <a:t>第二層</a:t>
             </a:r>
           </a:p>
           <a:p>
             <a:pPr lvl="2"/>
             <a:r>
-              <a:rPr lang="zh-TW" altLang="en-US" smtClean="0"/>
+              <a:rPr lang="zh-TW" altLang="en-US"/>
               <a:t>第三層</a:t>
             </a:r>
           </a:p>
           <a:p>
             <a:pPr lvl="3"/>
             <a:r>
-              <a:rPr lang="zh-TW" altLang="en-US" smtClean="0"/>
+              <a:rPr lang="zh-TW" altLang="en-US"/>
               <a:t>第四層</a:t>
             </a:r>
           </a:p>
           <a:p>
             <a:pPr lvl="4"/>
             <a:r>
-              <a:rPr lang="zh-TW" altLang="en-US" smtClean="0"/>
+              <a:rPr lang="zh-TW" altLang="en-US"/>
               <a:t>第五層</a:t>
             </a:r>
-            <a:endParaRPr lang="zh-TW" altLang="en-US"/>
           </a:p>
         </p:txBody>
       </p:sp>
@@ -1293,38 +1286,37 @@
           <a:p>
             <a:pPr lvl="0"/>
             <a:r>
-              <a:rPr lang="zh-TW" altLang="en-US" smtClean="0"/>
+              <a:rPr lang="zh-TW" altLang="en-US"/>
               <a:t>按一下以編輯母片文字樣式</a:t>
             </a:r>
           </a:p>
           <a:p>
             <a:pPr lvl="1"/>
             <a:r>
-              <a:rPr lang="zh-TW" altLang="en-US" smtClean="0"/>
+              <a:rPr lang="zh-TW" altLang="en-US"/>
               <a:t>第二層</a:t>
             </a:r>
           </a:p>
           <a:p>
             <a:pPr lvl="2"/>
             <a:r>
-              <a:rPr lang="zh-TW" altLang="en-US" smtClean="0"/>
+              <a:rPr lang="zh-TW" altLang="en-US"/>
               <a:t>第三層</a:t>
             </a:r>
           </a:p>
           <a:p>
             <a:pPr lvl="3"/>
             <a:r>
-              <a:rPr lang="zh-TW" altLang="en-US" smtClean="0"/>
+              <a:rPr lang="zh-TW" altLang="en-US"/>
               <a:t>第四層</a:t>
             </a:r>
           </a:p>
           <a:p>
             <a:pPr lvl="4"/>
             <a:r>
-              <a:rPr lang="zh-TW" altLang="en-US" smtClean="0"/>
+              <a:rPr lang="zh-TW" altLang="en-US"/>
               <a:t>第五層</a:t>
             </a:r>
-            <a:endParaRPr lang="zh-TW" altLang="en-US"/>
           </a:p>
         </p:txBody>
       </p:sp>
@@ -1346,7 +1338,7 @@
             <a:fld id="{9C0041D8-0984-4F5E-821F-46606E2FF9E0}" type="datetimeFigureOut">
               <a:rPr lang="zh-TW" altLang="en-US" smtClean="0"/>
               <a:pPr/>
-              <a:t>2020/1/18</a:t>
+              <a:t>2024/10/1</a:t>
             </a:fld>
             <a:endParaRPr lang="zh-TW" altLang="en-US"/>
           </a:p>
@@ -1440,10 +1432,9 @@
           </a:lstStyle>
           <a:p>
             <a:r>
-              <a:rPr lang="zh-TW" altLang="en-US" smtClean="0"/>
+              <a:rPr lang="zh-TW" altLang="en-US"/>
               <a:t>按一下以編輯母片標題樣式</a:t>
             </a:r>
-            <a:endParaRPr lang="zh-TW" altLang="en-US"/>
           </a:p>
         </p:txBody>
       </p:sp>
@@ -1506,7 +1497,7 @@
           <a:p>
             <a:pPr lvl="0"/>
             <a:r>
-              <a:rPr lang="zh-TW" altLang="en-US" smtClean="0"/>
+              <a:rPr lang="zh-TW" altLang="en-US"/>
               <a:t>按一下以編輯母片文字樣式</a:t>
             </a:r>
           </a:p>
@@ -1562,38 +1553,37 @@
           <a:p>
             <a:pPr lvl="0"/>
             <a:r>
-              <a:rPr lang="zh-TW" altLang="en-US" smtClean="0"/>
+              <a:rPr lang="zh-TW" altLang="en-US"/>
               <a:t>按一下以編輯母片文字樣式</a:t>
             </a:r>
           </a:p>
           <a:p>
             <a:pPr lvl="1"/>
             <a:r>
-              <a:rPr lang="zh-TW" altLang="en-US" smtClean="0"/>
+              <a:rPr lang="zh-TW" altLang="en-US"/>
               <a:t>第二層</a:t>
             </a:r>
           </a:p>
           <a:p>
             <a:pPr lvl="2"/>
             <a:r>
-              <a:rPr lang="zh-TW" altLang="en-US" smtClean="0"/>
+              <a:rPr lang="zh-TW" altLang="en-US"/>
               <a:t>第三層</a:t>
             </a:r>
           </a:p>
           <a:p>
             <a:pPr lvl="3"/>
             <a:r>
-              <a:rPr lang="zh-TW" altLang="en-US" smtClean="0"/>
+              <a:rPr lang="zh-TW" altLang="en-US"/>
               <a:t>第四層</a:t>
             </a:r>
           </a:p>
           <a:p>
             <a:pPr lvl="4"/>
             <a:r>
-              <a:rPr lang="zh-TW" altLang="en-US" smtClean="0"/>
+              <a:rPr lang="zh-TW" altLang="en-US"/>
               <a:t>第五層</a:t>
             </a:r>
-            <a:endParaRPr lang="zh-TW" altLang="en-US"/>
           </a:p>
         </p:txBody>
       </p:sp>
@@ -1656,7 +1646,7 @@
           <a:p>
             <a:pPr lvl="0"/>
             <a:r>
-              <a:rPr lang="zh-TW" altLang="en-US" smtClean="0"/>
+              <a:rPr lang="zh-TW" altLang="en-US"/>
               <a:t>按一下以編輯母片文字樣式</a:t>
             </a:r>
           </a:p>
@@ -1712,38 +1702,37 @@
           <a:p>
             <a:pPr lvl="0"/>
             <a:r>
-              <a:rPr lang="zh-TW" altLang="en-US" smtClean="0"/>
+              <a:rPr lang="zh-TW" altLang="en-US"/>
               <a:t>按一下以編輯母片文字樣式</a:t>
             </a:r>
           </a:p>
           <a:p>
             <a:pPr lvl="1"/>
             <a:r>
-              <a:rPr lang="zh-TW" altLang="en-US" smtClean="0"/>
+              <a:rPr lang="zh-TW" altLang="en-US"/>
               <a:t>第二層</a:t>
             </a:r>
           </a:p>
           <a:p>
             <a:pPr lvl="2"/>
             <a:r>
-              <a:rPr lang="zh-TW" altLang="en-US" smtClean="0"/>
+              <a:rPr lang="zh-TW" altLang="en-US"/>
               <a:t>第三層</a:t>
             </a:r>
           </a:p>
           <a:p>
             <a:pPr lvl="3"/>
             <a:r>
-              <a:rPr lang="zh-TW" altLang="en-US" smtClean="0"/>
+              <a:rPr lang="zh-TW" altLang="en-US"/>
               <a:t>第四層</a:t>
             </a:r>
           </a:p>
           <a:p>
             <a:pPr lvl="4"/>
             <a:r>
-              <a:rPr lang="zh-TW" altLang="en-US" smtClean="0"/>
+              <a:rPr lang="zh-TW" altLang="en-US"/>
               <a:t>第五層</a:t>
             </a:r>
-            <a:endParaRPr lang="zh-TW" altLang="en-US"/>
           </a:p>
         </p:txBody>
       </p:sp>
@@ -1765,7 +1754,7 @@
             <a:fld id="{9C0041D8-0984-4F5E-821F-46606E2FF9E0}" type="datetimeFigureOut">
               <a:rPr lang="zh-TW" altLang="en-US" smtClean="0"/>
               <a:pPr/>
-              <a:t>2020/1/18</a:t>
+              <a:t>2024/10/1</a:t>
             </a:fld>
             <a:endParaRPr lang="zh-TW" altLang="en-US"/>
           </a:p>
@@ -1855,10 +1844,9 @@
           <a:lstStyle/>
           <a:p>
             <a:r>
-              <a:rPr lang="zh-TW" altLang="en-US" smtClean="0"/>
+              <a:rPr lang="zh-TW" altLang="en-US"/>
               <a:t>按一下以編輯母片標題樣式</a:t>
             </a:r>
-            <a:endParaRPr lang="zh-TW" altLang="en-US"/>
           </a:p>
         </p:txBody>
       </p:sp>
@@ -1880,7 +1868,7 @@
             <a:fld id="{9C0041D8-0984-4F5E-821F-46606E2FF9E0}" type="datetimeFigureOut">
               <a:rPr lang="zh-TW" altLang="en-US" smtClean="0"/>
               <a:pPr/>
-              <a:t>2020/1/18</a:t>
+              <a:t>2024/10/1</a:t>
             </a:fld>
             <a:endParaRPr lang="zh-TW" altLang="en-US"/>
           </a:p>
@@ -1972,7 +1960,7 @@
             <a:fld id="{9C0041D8-0984-4F5E-821F-46606E2FF9E0}" type="datetimeFigureOut">
               <a:rPr lang="zh-TW" altLang="en-US" smtClean="0"/>
               <a:pPr/>
-              <a:t>2020/1/18</a:t>
+              <a:t>2024/10/1</a:t>
             </a:fld>
             <a:endParaRPr lang="zh-TW" altLang="en-US"/>
           </a:p>
@@ -2071,10 +2059,9 @@
           </a:lstStyle>
           <a:p>
             <a:r>
-              <a:rPr lang="zh-TW" altLang="en-US" smtClean="0"/>
+              <a:rPr lang="zh-TW" altLang="en-US"/>
               <a:t>按一下以編輯母片標題樣式</a:t>
             </a:r>
-            <a:endParaRPr lang="zh-TW" altLang="en-US"/>
           </a:p>
         </p:txBody>
       </p:sp>
@@ -2128,38 +2115,37 @@
           <a:p>
             <a:pPr lvl="0"/>
             <a:r>
-              <a:rPr lang="zh-TW" altLang="en-US" smtClean="0"/>
+              <a:rPr lang="zh-TW" altLang="en-US"/>
               <a:t>按一下以編輯母片文字樣式</a:t>
             </a:r>
           </a:p>
           <a:p>
             <a:pPr lvl="1"/>
             <a:r>
-              <a:rPr lang="zh-TW" altLang="en-US" smtClean="0"/>
+              <a:rPr lang="zh-TW" altLang="en-US"/>
               <a:t>第二層</a:t>
             </a:r>
           </a:p>
           <a:p>
             <a:pPr lvl="2"/>
             <a:r>
-              <a:rPr lang="zh-TW" altLang="en-US" smtClean="0"/>
+              <a:rPr lang="zh-TW" altLang="en-US"/>
               <a:t>第三層</a:t>
             </a:r>
           </a:p>
           <a:p>
             <a:pPr lvl="3"/>
             <a:r>
-              <a:rPr lang="zh-TW" altLang="en-US" smtClean="0"/>
+              <a:rPr lang="zh-TW" altLang="en-US"/>
               <a:t>第四層</a:t>
             </a:r>
           </a:p>
           <a:p>
             <a:pPr lvl="4"/>
             <a:r>
-              <a:rPr lang="zh-TW" altLang="en-US" smtClean="0"/>
+              <a:rPr lang="zh-TW" altLang="en-US"/>
               <a:t>第五層</a:t>
             </a:r>
-            <a:endParaRPr lang="zh-TW" altLang="en-US"/>
           </a:p>
         </p:txBody>
       </p:sp>
@@ -2222,7 +2208,7 @@
           <a:p>
             <a:pPr lvl="0"/>
             <a:r>
-              <a:rPr lang="zh-TW" altLang="en-US" smtClean="0"/>
+              <a:rPr lang="zh-TW" altLang="en-US"/>
               <a:t>按一下以編輯母片文字樣式</a:t>
             </a:r>
           </a:p>
@@ -2246,7 +2232,7 @@
             <a:fld id="{9C0041D8-0984-4F5E-821F-46606E2FF9E0}" type="datetimeFigureOut">
               <a:rPr lang="zh-TW" altLang="en-US" smtClean="0"/>
               <a:pPr/>
-              <a:t>2020/1/18</a:t>
+              <a:t>2024/10/1</a:t>
             </a:fld>
             <a:endParaRPr lang="zh-TW" altLang="en-US"/>
           </a:p>
@@ -2345,10 +2331,9 @@
           </a:lstStyle>
           <a:p>
             <a:r>
-              <a:rPr lang="zh-TW" altLang="en-US" smtClean="0"/>
+              <a:rPr lang="zh-TW" altLang="en-US"/>
               <a:t>按一下以編輯母片標題樣式</a:t>
             </a:r>
-            <a:endParaRPr lang="zh-TW" altLang="en-US"/>
           </a:p>
         </p:txBody>
       </p:sp>
@@ -2410,10 +2395,9 @@
           </a:lstStyle>
           <a:p>
             <a:r>
-              <a:rPr lang="zh-TW" altLang="en-US" smtClean="0"/>
+              <a:rPr lang="zh-TW" altLang="en-US"/>
               <a:t>按一下圖示以新增圖片</a:t>
             </a:r>
-            <a:endParaRPr lang="zh-TW" altLang="en-US"/>
           </a:p>
         </p:txBody>
       </p:sp>
@@ -2476,7 +2460,7 @@
           <a:p>
             <a:pPr lvl="0"/>
             <a:r>
-              <a:rPr lang="zh-TW" altLang="en-US" smtClean="0"/>
+              <a:rPr lang="zh-TW" altLang="en-US"/>
               <a:t>按一下以編輯母片文字樣式</a:t>
             </a:r>
           </a:p>
@@ -2500,7 +2484,7 @@
             <a:fld id="{9C0041D8-0984-4F5E-821F-46606E2FF9E0}" type="datetimeFigureOut">
               <a:rPr lang="zh-TW" altLang="en-US" smtClean="0"/>
               <a:pPr/>
-              <a:t>2020/1/18</a:t>
+              <a:t>2024/10/1</a:t>
             </a:fld>
             <a:endParaRPr lang="zh-TW" altLang="en-US"/>
           </a:p>
@@ -2610,10 +2594,9 @@
           <a:lstStyle/>
           <a:p>
             <a:r>
-              <a:rPr lang="zh-TW" altLang="en-US" smtClean="0"/>
+              <a:rPr lang="zh-TW" altLang="en-US"/>
               <a:t>按一下以編輯母片標題樣式</a:t>
             </a:r>
-            <a:endParaRPr lang="zh-TW" altLang="en-US"/>
           </a:p>
         </p:txBody>
       </p:sp>
@@ -2644,38 +2627,37 @@
           <a:p>
             <a:pPr lvl="0"/>
             <a:r>
-              <a:rPr lang="zh-TW" altLang="en-US" smtClean="0"/>
+              <a:rPr lang="zh-TW" altLang="en-US"/>
               <a:t>按一下以編輯母片文字樣式</a:t>
             </a:r>
           </a:p>
           <a:p>
             <a:pPr lvl="1"/>
             <a:r>
-              <a:rPr lang="zh-TW" altLang="en-US" smtClean="0"/>
+              <a:rPr lang="zh-TW" altLang="en-US"/>
               <a:t>第二層</a:t>
             </a:r>
           </a:p>
           <a:p>
             <a:pPr lvl="2"/>
             <a:r>
-              <a:rPr lang="zh-TW" altLang="en-US" smtClean="0"/>
+              <a:rPr lang="zh-TW" altLang="en-US"/>
               <a:t>第三層</a:t>
             </a:r>
           </a:p>
           <a:p>
             <a:pPr lvl="3"/>
             <a:r>
-              <a:rPr lang="zh-TW" altLang="en-US" smtClean="0"/>
+              <a:rPr lang="zh-TW" altLang="en-US"/>
               <a:t>第四層</a:t>
             </a:r>
           </a:p>
           <a:p>
             <a:pPr lvl="4"/>
             <a:r>
-              <a:rPr lang="zh-TW" altLang="en-US" smtClean="0"/>
+              <a:rPr lang="zh-TW" altLang="en-US"/>
               <a:t>第五層</a:t>
             </a:r>
-            <a:endParaRPr lang="zh-TW" altLang="en-US"/>
           </a:p>
         </p:txBody>
       </p:sp>
@@ -2715,7 +2697,7 @@
             <a:fld id="{9C0041D8-0984-4F5E-821F-46606E2FF9E0}" type="datetimeFigureOut">
               <a:rPr lang="zh-TW" altLang="en-US" smtClean="0"/>
               <a:pPr/>
-              <a:t>2020/1/18</a:t>
+              <a:t>2024/10/1</a:t>
             </a:fld>
             <a:endParaRPr lang="zh-TW" altLang="en-US"/>
           </a:p>
@@ -3096,16 +3078,30 @@
             <p:ph type="title"/>
           </p:nvPr>
         </p:nvSpPr>
-        <p:spPr/>
-        <p:txBody>
-          <a:bodyPr/>
-          <a:lstStyle/>
-          <a:p>
-            <a:r>
-              <a:rPr lang="zh-TW" altLang="en-US" b="1" dirty="0">
-                <a:solidFill>
-                  <a:srgbClr val="002060"/>
-                </a:solidFill>
+        <p:spPr>
+          <a:xfrm>
+            <a:off x="0" y="2756925"/>
+            <a:ext cx="12192000" cy="1143000"/>
+          </a:xfrm>
+        </p:spPr>
+        <p:txBody>
+          <a:bodyPr>
+            <a:noAutofit/>
+          </a:bodyPr>
+          <a:lstStyle/>
+          <a:p>
+            <a:r>
+              <a:rPr lang="zh-TW" altLang="en-US" sz="7200" b="1" i="1" dirty="0">
+                <a:solidFill>
+                  <a:srgbClr val="000066"/>
+                </a:solidFill>
+                <a:effectLst>
+                  <a:outerShdw blurRad="38100" dist="38100" dir="2700000" algn="tl">
+                    <a:srgbClr val="000000">
+                      <a:alpha val="43137"/>
+                    </a:srgbClr>
+                  </a:outerShdw>
+                </a:effectLst>
                 <a:latin typeface="微軟正黑體" pitchFamily="34" charset="-120"/>
                 <a:ea typeface="微軟正黑體" pitchFamily="34" charset="-120"/>
               </a:rPr>
@@ -3114,166 +3110,12 @@
           </a:p>
         </p:txBody>
       </p:sp>
-      <p:sp>
-        <p:nvSpPr>
-          <p:cNvPr id="5" name="內容版面配置區 4"/>
-          <p:cNvSpPr>
-            <a:spLocks noGrp="1"/>
-          </p:cNvSpPr>
-          <p:nvPr>
-            <p:ph idx="1"/>
-          </p:nvPr>
-        </p:nvSpPr>
-        <p:spPr/>
-        <p:txBody>
-          <a:bodyPr>
-            <a:normAutofit/>
-          </a:bodyPr>
-          <a:lstStyle/>
-          <a:p>
-            <a:pPr algn="ctr">
-              <a:buNone/>
-            </a:pPr>
-            <a:r>
-              <a:rPr lang="zh-TW" altLang="en-US" sz="5400" b="1" dirty="0">
-                <a:solidFill>
-                  <a:srgbClr val="000066"/>
-                </a:solidFill>
-                <a:latin typeface="微軟正黑體" pitchFamily="34" charset="-120"/>
-                <a:ea typeface="微軟正黑體" pitchFamily="34" charset="-120"/>
-              </a:rPr>
-              <a:t>耶穌基督是</a:t>
-            </a:r>
-            <a:r>
-              <a:rPr lang="zh-TW" altLang="en-US" sz="5400" b="1" dirty="0">
-                <a:solidFill>
-                  <a:srgbClr val="000066"/>
-                </a:solidFill>
-                <a:latin typeface="微軟正黑體" pitchFamily="34" charset="-120"/>
-                <a:ea typeface="微軟正黑體" pitchFamily="34" charset="-120"/>
-              </a:rPr>
-              <a:t>至寶</a:t>
-            </a:r>
-            <a:endParaRPr lang="en-US" altLang="zh-TW" sz="5400" b="1" dirty="0">
-              <a:solidFill>
-                <a:srgbClr val="000066"/>
-              </a:solidFill>
-              <a:latin typeface="微軟正黑體" pitchFamily="34" charset="-120"/>
-              <a:ea typeface="微軟正黑體" pitchFamily="34" charset="-120"/>
-            </a:endParaRPr>
-          </a:p>
-          <a:p>
-            <a:pPr algn="ctr">
-              <a:buNone/>
-            </a:pPr>
-            <a:r>
-              <a:rPr lang="zh-TW" altLang="en-US" sz="5400" b="1" dirty="0">
-                <a:solidFill>
-                  <a:srgbClr val="000066"/>
-                </a:solidFill>
-                <a:latin typeface="微軟正黑體" pitchFamily="34" charset="-120"/>
-                <a:ea typeface="微軟正黑體" pitchFamily="34" charset="-120"/>
-              </a:rPr>
-              <a:t>是</a:t>
-            </a:r>
-            <a:r>
-              <a:rPr lang="zh-TW" altLang="en-US" sz="5400" b="1" dirty="0">
-                <a:solidFill>
-                  <a:srgbClr val="000066"/>
-                </a:solidFill>
-                <a:latin typeface="微軟正黑體" pitchFamily="34" charset="-120"/>
-                <a:ea typeface="微軟正黑體" pitchFamily="34" charset="-120"/>
-              </a:rPr>
-              <a:t>生命中的</a:t>
-            </a:r>
-            <a:r>
-              <a:rPr lang="zh-TW" altLang="en-US" sz="5400" b="1" dirty="0">
-                <a:solidFill>
-                  <a:srgbClr val="000066"/>
-                </a:solidFill>
-                <a:latin typeface="微軟正黑體" pitchFamily="34" charset="-120"/>
-                <a:ea typeface="微軟正黑體" pitchFamily="34" charset="-120"/>
-              </a:rPr>
-              <a:t>美好</a:t>
-            </a:r>
-            <a:endParaRPr lang="en-US" altLang="zh-TW" sz="5400" b="1" dirty="0">
-              <a:solidFill>
-                <a:srgbClr val="000066"/>
-              </a:solidFill>
-              <a:latin typeface="微軟正黑體" pitchFamily="34" charset="-120"/>
-              <a:ea typeface="微軟正黑體" pitchFamily="34" charset="-120"/>
-            </a:endParaRPr>
-          </a:p>
-          <a:p>
-            <a:pPr algn="ctr">
-              <a:buNone/>
-            </a:pPr>
-            <a:r>
-              <a:rPr lang="zh-TW" altLang="en-US" sz="5400" b="1" dirty="0">
-                <a:solidFill>
-                  <a:srgbClr val="000066"/>
-                </a:solidFill>
-                <a:latin typeface="微軟正黑體" pitchFamily="34" charset="-120"/>
-                <a:ea typeface="微軟正黑體" pitchFamily="34" charset="-120"/>
-              </a:rPr>
-              <a:t>十字架</a:t>
-            </a:r>
-            <a:r>
-              <a:rPr lang="zh-TW" altLang="en-US" sz="5400" b="1" dirty="0">
-                <a:solidFill>
-                  <a:srgbClr val="000066"/>
-                </a:solidFill>
-                <a:latin typeface="微軟正黑體" pitchFamily="34" charset="-120"/>
-                <a:ea typeface="微軟正黑體" pitchFamily="34" charset="-120"/>
-              </a:rPr>
-              <a:t>是我的</a:t>
-            </a:r>
-            <a:r>
-              <a:rPr lang="zh-TW" altLang="en-US" sz="5400" b="1" dirty="0">
-                <a:solidFill>
-                  <a:srgbClr val="000066"/>
-                </a:solidFill>
-                <a:latin typeface="微軟正黑體" pitchFamily="34" charset="-120"/>
-                <a:ea typeface="微軟正黑體" pitchFamily="34" charset="-120"/>
-              </a:rPr>
-              <a:t>榮耀</a:t>
-            </a:r>
-            <a:endParaRPr lang="en-US" altLang="zh-TW" sz="5400" b="1" dirty="0">
-              <a:solidFill>
-                <a:srgbClr val="000066"/>
-              </a:solidFill>
-              <a:latin typeface="微軟正黑體" pitchFamily="34" charset="-120"/>
-              <a:ea typeface="微軟正黑體" pitchFamily="34" charset="-120"/>
-            </a:endParaRPr>
-          </a:p>
-          <a:p>
-            <a:pPr algn="ctr">
-              <a:buNone/>
-            </a:pPr>
-            <a:r>
-              <a:rPr lang="zh-TW" altLang="en-US" sz="5400" b="1" dirty="0">
-                <a:solidFill>
-                  <a:srgbClr val="000066"/>
-                </a:solidFill>
-                <a:latin typeface="微軟正黑體" pitchFamily="34" charset="-120"/>
-                <a:ea typeface="微軟正黑體" pitchFamily="34" charset="-120"/>
-              </a:rPr>
-              <a:t>一生</a:t>
-            </a:r>
-            <a:r>
-              <a:rPr lang="zh-TW" altLang="en-US" sz="5400" b="1" dirty="0">
-                <a:solidFill>
-                  <a:srgbClr val="000066"/>
-                </a:solidFill>
-                <a:latin typeface="微軟正黑體" pitchFamily="34" charset="-120"/>
-                <a:ea typeface="微軟正黑體" pitchFamily="34" charset="-120"/>
-              </a:rPr>
-              <a:t>都跟隨快跑</a:t>
-            </a:r>
-          </a:p>
-        </p:txBody>
-      </p:sp>
     </p:spTree>
+    <p:extLst>
+      <p:ext uri="{BB962C8B-B14F-4D97-AF65-F5344CB8AC3E}">
+        <p14:creationId xmlns:p14="http://schemas.microsoft.com/office/powerpoint/2010/main" val="3457353964"/>
+      </p:ext>
+    </p:extLst>
   </p:cSld>
   <p:clrMapOvr>
     <a:masterClrMapping/>
@@ -3300,85 +3142,42 @@
       </p:grpSpPr>
       <p:sp>
         <p:nvSpPr>
-          <p:cNvPr id="4" name="標題 3"/>
-          <p:cNvSpPr>
-            <a:spLocks noGrp="1"/>
-          </p:cNvSpPr>
-          <p:nvPr>
-            <p:ph type="title"/>
-          </p:nvPr>
-        </p:nvSpPr>
-        <p:spPr/>
-        <p:txBody>
-          <a:bodyPr/>
-          <a:lstStyle/>
-          <a:p>
-            <a:r>
-              <a:rPr lang="zh-TW" altLang="en-US" b="1" dirty="0">
-                <a:solidFill>
-                  <a:srgbClr val="002060"/>
+          <p:cNvPr id="5" name="內容版面配置區 4"/>
+          <p:cNvSpPr>
+            <a:spLocks noGrp="1"/>
+          </p:cNvSpPr>
+          <p:nvPr>
+            <p:ph idx="1"/>
+          </p:nvPr>
+        </p:nvSpPr>
+        <p:spPr>
+          <a:xfrm>
+            <a:off x="0" y="2084851"/>
+            <a:ext cx="12192000" cy="2404863"/>
+          </a:xfrm>
+        </p:spPr>
+        <p:txBody>
+          <a:bodyPr anchor="ctr">
+            <a:normAutofit/>
+          </a:bodyPr>
+          <a:lstStyle/>
+          <a:p>
+            <a:pPr algn="ctr">
+              <a:buNone/>
+            </a:pPr>
+            <a:r>
+              <a:rPr lang="zh-TW" altLang="en-US" sz="6600" b="1" dirty="0">
+                <a:solidFill>
+                  <a:srgbClr val="000066"/>
                 </a:solidFill>
                 <a:latin typeface="微軟正黑體" pitchFamily="34" charset="-120"/>
                 <a:ea typeface="微軟正黑體" pitchFamily="34" charset="-120"/>
               </a:rPr>
-              <a:t>我要順服</a:t>
-            </a:r>
-          </a:p>
-        </p:txBody>
-      </p:sp>
-      <p:sp>
-        <p:nvSpPr>
-          <p:cNvPr id="5" name="內容版面配置區 4"/>
-          <p:cNvSpPr>
-            <a:spLocks noGrp="1"/>
-          </p:cNvSpPr>
-          <p:nvPr>
-            <p:ph idx="1"/>
-          </p:nvPr>
-        </p:nvSpPr>
-        <p:spPr/>
-        <p:txBody>
-          <a:bodyPr>
-            <a:normAutofit/>
-          </a:bodyPr>
-          <a:lstStyle/>
-          <a:p>
-            <a:pPr algn="ctr">
-              <a:buNone/>
-            </a:pPr>
-            <a:r>
-              <a:rPr lang="zh-TW" altLang="en-US" sz="5400" b="1" dirty="0">
-                <a:solidFill>
-                  <a:srgbClr val="002060"/>
-                </a:solidFill>
-                <a:latin typeface="微軟正黑體" pitchFamily="34" charset="-120"/>
-                <a:ea typeface="微軟正黑體" pitchFamily="34" charset="-120"/>
-              </a:rPr>
-              <a:t>我要順服  因為我</a:t>
-            </a:r>
-            <a:r>
-              <a:rPr lang="zh-TW" altLang="en-US" sz="5400" b="1" dirty="0" smtClean="0">
-                <a:solidFill>
-                  <a:srgbClr val="002060"/>
-                </a:solidFill>
-                <a:latin typeface="微軟正黑體" pitchFamily="34" charset="-120"/>
-                <a:ea typeface="微軟正黑體" pitchFamily="34" charset="-120"/>
-              </a:rPr>
-              <a:t>愛</a:t>
-            </a:r>
-            <a:r>
-              <a:rPr lang="zh-CN" altLang="en-US" sz="5400" b="1" dirty="0" smtClean="0">
-                <a:solidFill>
-                  <a:srgbClr val="002060"/>
-                </a:solidFill>
-                <a:latin typeface="微軟正黑體" pitchFamily="34" charset="-120"/>
-                <a:ea typeface="微軟正黑體" pitchFamily="34" charset="-120"/>
-              </a:rPr>
-              <a:t>袮</a:t>
-            </a:r>
-            <a:endParaRPr lang="en-US" altLang="zh-TW" sz="5400" b="1" dirty="0">
+              <a:t>耶穌基督是至寶</a:t>
+            </a:r>
+            <a:endParaRPr lang="en-US" altLang="zh-TW" sz="6600" b="1" dirty="0">
               <a:solidFill>
-                <a:srgbClr val="002060"/>
+                <a:srgbClr val="000066"/>
               </a:solidFill>
               <a:latin typeface="微軟正黑體" pitchFamily="34" charset="-120"/>
               <a:ea typeface="微軟正黑體" pitchFamily="34" charset="-120"/>
@@ -3389,70 +3188,93 @@
               <a:buNone/>
             </a:pPr>
             <a:r>
-              <a:rPr lang="zh-TW" altLang="en-US" sz="5400" b="1" dirty="0">
-                <a:solidFill>
-                  <a:srgbClr val="002060"/>
+              <a:rPr lang="zh-TW" altLang="en-US" sz="6600" b="1" dirty="0">
+                <a:solidFill>
+                  <a:srgbClr val="000066"/>
                 </a:solidFill>
                 <a:latin typeface="微軟正黑體" pitchFamily="34" charset="-120"/>
                 <a:ea typeface="微軟正黑體" pitchFamily="34" charset="-120"/>
               </a:rPr>
-              <a:t>無論何處到哪裡都忠心</a:t>
-            </a:r>
-            <a:endParaRPr lang="en-US" altLang="zh-TW" sz="5400" b="1" dirty="0">
+              <a:t>是生命中的美好</a:t>
+            </a:r>
+            <a:endParaRPr lang="en-US" altLang="zh-TW" sz="6600" b="1" dirty="0">
               <a:solidFill>
-                <a:srgbClr val="002060"/>
+                <a:srgbClr val="000066"/>
               </a:solidFill>
               <a:latin typeface="微軟正黑體" pitchFamily="34" charset="-120"/>
               <a:ea typeface="微軟正黑體" pitchFamily="34" charset="-120"/>
             </a:endParaRPr>
           </a:p>
-          <a:p>
-            <a:pPr algn="ctr">
-              <a:buNone/>
-            </a:pPr>
-            <a:r>
-              <a:rPr lang="zh-TW" altLang="en-US" sz="5400" b="1" dirty="0">
-                <a:solidFill>
-                  <a:srgbClr val="002060"/>
-                </a:solidFill>
-                <a:latin typeface="微軟正黑體" pitchFamily="34" charset="-120"/>
-                <a:ea typeface="微軟正黑體" pitchFamily="34" charset="-120"/>
+        </p:txBody>
+      </p:sp>
+      <p:sp>
+        <p:nvSpPr>
+          <p:cNvPr id="3" name="TextBox 2"/>
+          <p:cNvSpPr txBox="1"/>
+          <p:nvPr/>
+        </p:nvSpPr>
+        <p:spPr>
+          <a:xfrm>
+            <a:off x="0" y="5253203"/>
+            <a:ext cx="12192000" cy="666786"/>
+          </a:xfrm>
+          <a:prstGeom prst="rect">
+            <a:avLst/>
+          </a:prstGeom>
+          <a:noFill/>
+        </p:spPr>
+        <p:txBody>
+          <a:bodyPr wrap="square" rtlCol="0">
+            <a:spAutoFit/>
+          </a:bodyPr>
+          <a:lstStyle/>
+          <a:p>
+            <a:pPr algn="ctr"/>
+            <a:r>
+              <a:rPr lang="en-US" sz="3733" b="1" dirty="0">
+                <a:solidFill>
+                  <a:srgbClr val="000066"/>
+                </a:solidFill>
+                <a:latin typeface="Microsoft JhengHei" panose="020B0604030504040204" pitchFamily="34" charset="-120"/>
+                <a:ea typeface="Microsoft JhengHei" panose="020B0604030504040204" pitchFamily="34" charset="-120"/>
               </a:rPr>
-              <a:t>世界萬物都丟棄看作糞土</a:t>
-            </a:r>
-            <a:endParaRPr lang="en-US" altLang="zh-TW" sz="5400" b="1" dirty="0">
+              <a:t>( </a:t>
+            </a:r>
+            <a:r>
+              <a:rPr lang="zh-CN" altLang="en-US" sz="3733" b="1" dirty="0">
+                <a:solidFill>
+                  <a:srgbClr val="000066"/>
+                </a:solidFill>
+                <a:latin typeface="Microsoft JhengHei" panose="020B0604030504040204" pitchFamily="34" charset="-120"/>
+                <a:ea typeface="Microsoft JhengHei" panose="020B0604030504040204" pitchFamily="34" charset="-120"/>
+              </a:rPr>
+              <a:t>正歌</a:t>
+            </a:r>
+            <a:r>
+              <a:rPr lang="en-US" sz="3733" b="1" dirty="0">
+                <a:solidFill>
+                  <a:srgbClr val="000066"/>
+                </a:solidFill>
+                <a:latin typeface="Microsoft JhengHei" panose="020B0604030504040204" pitchFamily="34" charset="-120"/>
+                <a:ea typeface="Microsoft JhengHei" panose="020B0604030504040204" pitchFamily="34" charset="-120"/>
+              </a:rPr>
+              <a:t> )</a:t>
+            </a:r>
+            <a:endParaRPr lang="vi-VN" sz="3733" b="1" dirty="0">
               <a:solidFill>
-                <a:srgbClr val="002060"/>
+                <a:srgbClr val="000066"/>
               </a:solidFill>
-              <a:latin typeface="微軟正黑體" pitchFamily="34" charset="-120"/>
-              <a:ea typeface="微軟正黑體" pitchFamily="34" charset="-120"/>
+              <a:ea typeface="Microsoft JhengHei" panose="020B0604030504040204" pitchFamily="34" charset="-120"/>
             </a:endParaRPr>
           </a:p>
-          <a:p>
-            <a:pPr algn="ctr">
-              <a:buNone/>
-            </a:pPr>
-            <a:r>
-              <a:rPr lang="zh-TW" altLang="en-US" sz="5400" b="1" dirty="0">
-                <a:solidFill>
-                  <a:srgbClr val="002060"/>
-                </a:solidFill>
-                <a:latin typeface="微軟正黑體" pitchFamily="34" charset="-120"/>
-                <a:ea typeface="微軟正黑體" pitchFamily="34" charset="-120"/>
-              </a:rPr>
-              <a:t>為要得著耶穌基督</a:t>
-            </a:r>
-            <a:endParaRPr lang="zh-TW" altLang="en-US" sz="5400" b="1" dirty="0">
-              <a:solidFill>
-                <a:srgbClr val="002060"/>
-              </a:solidFill>
-              <a:latin typeface="微軟正黑體" pitchFamily="34" charset="-120"/>
-              <a:ea typeface="微軟正黑體" pitchFamily="34" charset="-120"/>
-            </a:endParaRPr>
-          </a:p>
         </p:txBody>
       </p:sp>
     </p:spTree>
+    <p:extLst>
+      <p:ext uri="{BB962C8B-B14F-4D97-AF65-F5344CB8AC3E}">
+        <p14:creationId xmlns:p14="http://schemas.microsoft.com/office/powerpoint/2010/main" val="2502075208"/>
+      </p:ext>
+    </p:extLst>
   </p:cSld>
   <p:clrMapOvr>
     <a:masterClrMapping/>
@@ -3479,65 +3301,42 @@
       </p:grpSpPr>
       <p:sp>
         <p:nvSpPr>
-          <p:cNvPr id="4" name="標題 3"/>
-          <p:cNvSpPr>
-            <a:spLocks noGrp="1"/>
-          </p:cNvSpPr>
-          <p:nvPr>
-            <p:ph type="title"/>
-          </p:nvPr>
-        </p:nvSpPr>
-        <p:spPr/>
-        <p:txBody>
-          <a:bodyPr/>
-          <a:lstStyle/>
-          <a:p>
-            <a:r>
-              <a:rPr lang="zh-TW" altLang="en-US" b="1" dirty="0">
-                <a:solidFill>
-                  <a:srgbClr val="002060"/>
+          <p:cNvPr id="5" name="內容版面配置區 4"/>
+          <p:cNvSpPr>
+            <a:spLocks noGrp="1"/>
+          </p:cNvSpPr>
+          <p:nvPr>
+            <p:ph idx="1"/>
+          </p:nvPr>
+        </p:nvSpPr>
+        <p:spPr>
+          <a:xfrm>
+            <a:off x="0" y="2084851"/>
+            <a:ext cx="12192000" cy="2404863"/>
+          </a:xfrm>
+        </p:spPr>
+        <p:txBody>
+          <a:bodyPr anchor="ctr">
+            <a:normAutofit/>
+          </a:bodyPr>
+          <a:lstStyle/>
+          <a:p>
+            <a:pPr algn="ctr">
+              <a:buNone/>
+            </a:pPr>
+            <a:r>
+              <a:rPr lang="zh-TW" altLang="en-US" sz="6600" b="1" dirty="0">
+                <a:solidFill>
+                  <a:srgbClr val="000066"/>
                 </a:solidFill>
                 <a:latin typeface="微軟正黑體" pitchFamily="34" charset="-120"/>
                 <a:ea typeface="微軟正黑體" pitchFamily="34" charset="-120"/>
               </a:rPr>
-              <a:t>我要順服</a:t>
-            </a:r>
-          </a:p>
-        </p:txBody>
-      </p:sp>
-      <p:sp>
-        <p:nvSpPr>
-          <p:cNvPr id="5" name="內容版面配置區 4"/>
-          <p:cNvSpPr>
-            <a:spLocks noGrp="1"/>
-          </p:cNvSpPr>
-          <p:nvPr>
-            <p:ph idx="1"/>
-          </p:nvPr>
-        </p:nvSpPr>
-        <p:spPr/>
-        <p:txBody>
-          <a:bodyPr>
-            <a:normAutofit/>
-          </a:bodyPr>
-          <a:lstStyle/>
-          <a:p>
-            <a:pPr algn="ctr">
-              <a:buNone/>
-            </a:pPr>
-            <a:r>
-              <a:rPr lang="zh-CN" altLang="en-US" sz="5400" b="1" dirty="0">
-                <a:solidFill>
-                  <a:srgbClr val="002060"/>
-                </a:solidFill>
-                <a:latin typeface="微軟正黑體" pitchFamily="34" charset="-120"/>
-                <a:ea typeface="微軟正黑體" pitchFamily="34" charset="-120"/>
-              </a:rPr>
-              <a:t>我要順服因為我愛祢</a:t>
-            </a:r>
-            <a:endParaRPr lang="en-US" altLang="zh-CN" sz="5400" b="1" dirty="0">
+              <a:t>十字架是我的榮耀</a:t>
+            </a:r>
+            <a:endParaRPr lang="en-US" altLang="zh-TW" sz="6600" b="1" dirty="0">
               <a:solidFill>
-                <a:srgbClr val="002060"/>
+                <a:srgbClr val="000066"/>
               </a:solidFill>
               <a:latin typeface="微軟正黑體" pitchFamily="34" charset="-120"/>
               <a:ea typeface="微軟正黑體" pitchFamily="34" charset="-120"/>
@@ -3548,40 +3347,628 @@
               <a:buNone/>
             </a:pPr>
             <a:r>
-              <a:rPr lang="zh-CN" altLang="en-US" sz="5400" b="1" dirty="0">
-                <a:solidFill>
-                  <a:srgbClr val="002060"/>
+              <a:rPr lang="zh-TW" altLang="en-US" sz="6600" b="1" dirty="0">
+                <a:solidFill>
+                  <a:srgbClr val="000066"/>
+                </a:solidFill>
+                <a:latin typeface="微軟正黑體" pitchFamily="34" charset="-120"/>
+                <a:ea typeface="微軟正黑體" pitchFamily="34" charset="-120"/>
+              </a:rPr>
+              <a:t>一生都跟隨快跑</a:t>
+            </a:r>
+          </a:p>
+        </p:txBody>
+      </p:sp>
+      <p:sp>
+        <p:nvSpPr>
+          <p:cNvPr id="3" name="TextBox 2"/>
+          <p:cNvSpPr txBox="1"/>
+          <p:nvPr/>
+        </p:nvSpPr>
+        <p:spPr>
+          <a:xfrm>
+            <a:off x="0" y="5253203"/>
+            <a:ext cx="12192000" cy="666786"/>
+          </a:xfrm>
+          <a:prstGeom prst="rect">
+            <a:avLst/>
+          </a:prstGeom>
+          <a:noFill/>
+        </p:spPr>
+        <p:txBody>
+          <a:bodyPr wrap="square" rtlCol="0">
+            <a:spAutoFit/>
+          </a:bodyPr>
+          <a:lstStyle/>
+          <a:p>
+            <a:pPr algn="ctr"/>
+            <a:r>
+              <a:rPr lang="en-US" sz="3733" b="1" dirty="0">
+                <a:solidFill>
+                  <a:srgbClr val="000066"/>
+                </a:solidFill>
+                <a:latin typeface="Microsoft JhengHei" panose="020B0604030504040204" pitchFamily="34" charset="-120"/>
+                <a:ea typeface="Microsoft JhengHei" panose="020B0604030504040204" pitchFamily="34" charset="-120"/>
+              </a:rPr>
+              <a:t>( </a:t>
+            </a:r>
+            <a:r>
+              <a:rPr lang="zh-CN" altLang="en-US" sz="3733" b="1" dirty="0">
+                <a:solidFill>
+                  <a:srgbClr val="000066"/>
+                </a:solidFill>
+                <a:latin typeface="Microsoft JhengHei" panose="020B0604030504040204" pitchFamily="34" charset="-120"/>
+                <a:ea typeface="Microsoft JhengHei" panose="020B0604030504040204" pitchFamily="34" charset="-120"/>
+              </a:rPr>
+              <a:t>正歌</a:t>
+            </a:r>
+            <a:r>
+              <a:rPr lang="en-US" sz="3733" b="1" dirty="0">
+                <a:solidFill>
+                  <a:srgbClr val="000066"/>
+                </a:solidFill>
+                <a:latin typeface="Microsoft JhengHei" panose="020B0604030504040204" pitchFamily="34" charset="-120"/>
+                <a:ea typeface="Microsoft JhengHei" panose="020B0604030504040204" pitchFamily="34" charset="-120"/>
+              </a:rPr>
+              <a:t> )</a:t>
+            </a:r>
+            <a:endParaRPr lang="vi-VN" sz="3733" b="1" dirty="0">
+              <a:solidFill>
+                <a:srgbClr val="000066"/>
+              </a:solidFill>
+              <a:ea typeface="Microsoft JhengHei" panose="020B0604030504040204" pitchFamily="34" charset="-120"/>
+            </a:endParaRPr>
+          </a:p>
+        </p:txBody>
+      </p:sp>
+    </p:spTree>
+    <p:extLst>
+      <p:ext uri="{BB962C8B-B14F-4D97-AF65-F5344CB8AC3E}">
+        <p14:creationId xmlns:p14="http://schemas.microsoft.com/office/powerpoint/2010/main" val="1939554903"/>
+      </p:ext>
+    </p:extLst>
+  </p:cSld>
+  <p:clrMapOvr>
+    <a:masterClrMapping/>
+  </p:clrMapOvr>
+</p:sld>
+</file>
+
+<file path=ppt/slides/slide4.xml><?xml version="1.0" encoding="utf-8"?>
+<p:sld xmlns:a="http://schemas.openxmlformats.org/drawingml/2006/main" xmlns:r="http://schemas.openxmlformats.org/officeDocument/2006/relationships" xmlns:p="http://schemas.openxmlformats.org/presentationml/2006/main">
+  <p:cSld>
+    <p:spTree>
+      <p:nvGrpSpPr>
+        <p:cNvPr id="1" name=""/>
+        <p:cNvGrpSpPr/>
+        <p:nvPr/>
+      </p:nvGrpSpPr>
+      <p:grpSpPr>
+        <a:xfrm>
+          <a:off x="0" y="0"/>
+          <a:ext cx="0" cy="0"/>
+          <a:chOff x="0" y="0"/>
+          <a:chExt cx="0" cy="0"/>
+        </a:xfrm>
+      </p:grpSpPr>
+      <p:sp>
+        <p:nvSpPr>
+          <p:cNvPr id="5" name="內容版面配置區 4"/>
+          <p:cNvSpPr>
+            <a:spLocks noGrp="1"/>
+          </p:cNvSpPr>
+          <p:nvPr>
+            <p:ph idx="1"/>
+          </p:nvPr>
+        </p:nvSpPr>
+        <p:spPr>
+          <a:xfrm>
+            <a:off x="0" y="2084851"/>
+            <a:ext cx="12192000" cy="2404863"/>
+          </a:xfrm>
+        </p:spPr>
+        <p:txBody>
+          <a:bodyPr anchor="ctr">
+            <a:normAutofit/>
+          </a:bodyPr>
+          <a:lstStyle/>
+          <a:p>
+            <a:pPr algn="ctr">
+              <a:buNone/>
+            </a:pPr>
+            <a:r>
+              <a:rPr lang="zh-TW" altLang="en-US" sz="6600" b="1" dirty="0">
+                <a:solidFill>
+                  <a:srgbClr val="000066"/>
+                </a:solidFill>
+                <a:latin typeface="微軟正黑體" pitchFamily="34" charset="-120"/>
+                <a:ea typeface="微軟正黑體" pitchFamily="34" charset="-120"/>
+              </a:rPr>
+              <a:t>我要順服  因為我愛</a:t>
+            </a:r>
+            <a:r>
+              <a:rPr lang="zh-CN" altLang="en-US" sz="6600" b="1" dirty="0">
+                <a:solidFill>
+                  <a:srgbClr val="000066"/>
+                </a:solidFill>
+                <a:latin typeface="微軟正黑體" pitchFamily="34" charset="-120"/>
+                <a:ea typeface="微軟正黑體" pitchFamily="34" charset="-120"/>
+              </a:rPr>
+              <a:t>祢</a:t>
+            </a:r>
+            <a:endParaRPr lang="en-US" altLang="zh-TW" sz="6600" b="1" dirty="0">
+              <a:solidFill>
+                <a:srgbClr val="000066"/>
+              </a:solidFill>
+              <a:latin typeface="微軟正黑體" pitchFamily="34" charset="-120"/>
+              <a:ea typeface="微軟正黑體" pitchFamily="34" charset="-120"/>
+            </a:endParaRPr>
+          </a:p>
+          <a:p>
+            <a:pPr algn="ctr">
+              <a:buNone/>
+            </a:pPr>
+            <a:r>
+              <a:rPr lang="zh-TW" altLang="en-US" sz="6600" b="1" dirty="0">
+                <a:solidFill>
+                  <a:srgbClr val="000066"/>
                 </a:solidFill>
                 <a:latin typeface="微軟正黑體" pitchFamily="34" charset="-120"/>
                 <a:ea typeface="微軟正黑體" pitchFamily="34" charset="-120"/>
               </a:rPr>
               <a:t>無論何處到哪裡都忠心</a:t>
             </a:r>
-            <a:endParaRPr lang="zh-TW" altLang="en-US" sz="5400" b="1" dirty="0">
+            <a:endParaRPr lang="en-US" altLang="zh-TW" sz="6600" b="1" dirty="0">
               <a:solidFill>
-                <a:srgbClr val="002060"/>
+                <a:srgbClr val="000066"/>
               </a:solidFill>
               <a:latin typeface="微軟正黑體" pitchFamily="34" charset="-120"/>
               <a:ea typeface="微軟正黑體" pitchFamily="34" charset="-120"/>
             </a:endParaRPr>
           </a:p>
+        </p:txBody>
+      </p:sp>
+      <p:sp>
+        <p:nvSpPr>
+          <p:cNvPr id="3" name="TextBox 2"/>
+          <p:cNvSpPr txBox="1"/>
+          <p:nvPr/>
+        </p:nvSpPr>
+        <p:spPr>
+          <a:xfrm>
+            <a:off x="0" y="5253203"/>
+            <a:ext cx="12192000" cy="666786"/>
+          </a:xfrm>
+          <a:prstGeom prst="rect">
+            <a:avLst/>
+          </a:prstGeom>
+          <a:noFill/>
+        </p:spPr>
+        <p:txBody>
+          <a:bodyPr wrap="square" rtlCol="0">
+            <a:spAutoFit/>
+          </a:bodyPr>
+          <a:lstStyle/>
+          <a:p>
+            <a:pPr algn="ctr"/>
+            <a:r>
+              <a:rPr lang="en-US" sz="3733" b="1" dirty="0">
+                <a:solidFill>
+                  <a:srgbClr val="000066"/>
+                </a:solidFill>
+                <a:latin typeface="Microsoft JhengHei" panose="020B0604030504040204" pitchFamily="34" charset="-120"/>
+                <a:ea typeface="Microsoft JhengHei" panose="020B0604030504040204" pitchFamily="34" charset="-120"/>
+              </a:rPr>
+              <a:t>( </a:t>
+            </a:r>
+            <a:r>
+              <a:rPr lang="zh-CN" altLang="en-US" sz="3733" b="1" dirty="0">
+                <a:solidFill>
+                  <a:srgbClr val="000066"/>
+                </a:solidFill>
+                <a:latin typeface="Microsoft JhengHei" panose="020B0604030504040204" pitchFamily="34" charset="-120"/>
+                <a:ea typeface="Microsoft JhengHei" panose="020B0604030504040204" pitchFamily="34" charset="-120"/>
+              </a:rPr>
+              <a:t>副歌</a:t>
+            </a:r>
+            <a:r>
+              <a:rPr lang="en-US" sz="3733" b="1" dirty="0">
+                <a:solidFill>
+                  <a:srgbClr val="000066"/>
+                </a:solidFill>
+                <a:latin typeface="Microsoft JhengHei" panose="020B0604030504040204" pitchFamily="34" charset="-120"/>
+                <a:ea typeface="Microsoft JhengHei" panose="020B0604030504040204" pitchFamily="34" charset="-120"/>
+              </a:rPr>
+              <a:t> )</a:t>
+            </a:r>
+            <a:endParaRPr lang="vi-VN" sz="3733" b="1" dirty="0">
+              <a:solidFill>
+                <a:srgbClr val="000066"/>
+              </a:solidFill>
+              <a:ea typeface="Microsoft JhengHei" panose="020B0604030504040204" pitchFamily="34" charset="-120"/>
+            </a:endParaRPr>
+          </a:p>
+        </p:txBody>
+      </p:sp>
+    </p:spTree>
+    <p:extLst>
+      <p:ext uri="{BB962C8B-B14F-4D97-AF65-F5344CB8AC3E}">
+        <p14:creationId xmlns:p14="http://schemas.microsoft.com/office/powerpoint/2010/main" val="4119056460"/>
+      </p:ext>
+    </p:extLst>
+  </p:cSld>
+  <p:clrMapOvr>
+    <a:masterClrMapping/>
+  </p:clrMapOvr>
+</p:sld>
+</file>
+
+<file path=ppt/slides/slide5.xml><?xml version="1.0" encoding="utf-8"?>
+<p:sld xmlns:a="http://schemas.openxmlformats.org/drawingml/2006/main" xmlns:r="http://schemas.openxmlformats.org/officeDocument/2006/relationships" xmlns:p="http://schemas.openxmlformats.org/presentationml/2006/main">
+  <p:cSld>
+    <p:spTree>
+      <p:nvGrpSpPr>
+        <p:cNvPr id="1" name=""/>
+        <p:cNvGrpSpPr/>
+        <p:nvPr/>
+      </p:nvGrpSpPr>
+      <p:grpSpPr>
+        <a:xfrm>
+          <a:off x="0" y="0"/>
+          <a:ext cx="0" cy="0"/>
+          <a:chOff x="0" y="0"/>
+          <a:chExt cx="0" cy="0"/>
+        </a:xfrm>
+      </p:grpSpPr>
+      <p:sp>
+        <p:nvSpPr>
+          <p:cNvPr id="5" name="內容版面配置區 4"/>
+          <p:cNvSpPr>
+            <a:spLocks noGrp="1"/>
+          </p:cNvSpPr>
+          <p:nvPr>
+            <p:ph idx="1"/>
+          </p:nvPr>
+        </p:nvSpPr>
+        <p:spPr>
+          <a:xfrm>
+            <a:off x="0" y="2084851"/>
+            <a:ext cx="12192000" cy="2404863"/>
+          </a:xfrm>
+        </p:spPr>
+        <p:txBody>
+          <a:bodyPr anchor="ctr">
+            <a:normAutofit/>
+          </a:bodyPr>
+          <a:lstStyle/>
           <a:p>
             <a:pPr algn="ctr">
               <a:buNone/>
             </a:pPr>
             <a:r>
-              <a:rPr lang="zh-CN" altLang="en-US" sz="5400" b="1" dirty="0">
-                <a:solidFill>
-                  <a:srgbClr val="002060"/>
+              <a:rPr lang="zh-TW" altLang="en-US" sz="6600" b="1" dirty="0">
+                <a:solidFill>
+                  <a:srgbClr val="000066"/>
+                </a:solidFill>
+                <a:latin typeface="微軟正黑體" pitchFamily="34" charset="-120"/>
+                <a:ea typeface="微軟正黑體" pitchFamily="34" charset="-120"/>
+              </a:rPr>
+              <a:t>世界萬物都丟棄看作糞土</a:t>
+            </a:r>
+            <a:endParaRPr lang="en-US" altLang="zh-TW" sz="6600" b="1" dirty="0">
+              <a:solidFill>
+                <a:srgbClr val="000066"/>
+              </a:solidFill>
+              <a:latin typeface="微軟正黑體" pitchFamily="34" charset="-120"/>
+              <a:ea typeface="微軟正黑體" pitchFamily="34" charset="-120"/>
+            </a:endParaRPr>
+          </a:p>
+          <a:p>
+            <a:pPr algn="ctr">
+              <a:buNone/>
+            </a:pPr>
+            <a:r>
+              <a:rPr lang="zh-TW" altLang="en-US" sz="6600" b="1" dirty="0">
+                <a:solidFill>
+                  <a:srgbClr val="000066"/>
+                </a:solidFill>
+                <a:latin typeface="微軟正黑體" pitchFamily="34" charset="-120"/>
+                <a:ea typeface="微軟正黑體" pitchFamily="34" charset="-120"/>
+              </a:rPr>
+              <a:t>為要得著耶穌基督</a:t>
+            </a:r>
+          </a:p>
+        </p:txBody>
+      </p:sp>
+      <p:sp>
+        <p:nvSpPr>
+          <p:cNvPr id="3" name="TextBox 2"/>
+          <p:cNvSpPr txBox="1"/>
+          <p:nvPr/>
+        </p:nvSpPr>
+        <p:spPr>
+          <a:xfrm>
+            <a:off x="0" y="5253203"/>
+            <a:ext cx="12192000" cy="666786"/>
+          </a:xfrm>
+          <a:prstGeom prst="rect">
+            <a:avLst/>
+          </a:prstGeom>
+          <a:noFill/>
+        </p:spPr>
+        <p:txBody>
+          <a:bodyPr wrap="square" rtlCol="0">
+            <a:spAutoFit/>
+          </a:bodyPr>
+          <a:lstStyle/>
+          <a:p>
+            <a:pPr algn="ctr"/>
+            <a:r>
+              <a:rPr lang="en-US" sz="3733" b="1" dirty="0">
+                <a:solidFill>
+                  <a:srgbClr val="000066"/>
+                </a:solidFill>
+                <a:latin typeface="Microsoft JhengHei" panose="020B0604030504040204" pitchFamily="34" charset="-120"/>
+                <a:ea typeface="Microsoft JhengHei" panose="020B0604030504040204" pitchFamily="34" charset="-120"/>
+              </a:rPr>
+              <a:t>( </a:t>
+            </a:r>
+            <a:r>
+              <a:rPr lang="zh-CN" altLang="en-US" sz="3733" b="1" dirty="0">
+                <a:solidFill>
+                  <a:srgbClr val="000066"/>
+                </a:solidFill>
+                <a:latin typeface="Microsoft JhengHei" panose="020B0604030504040204" pitchFamily="34" charset="-120"/>
+                <a:ea typeface="Microsoft JhengHei" panose="020B0604030504040204" pitchFamily="34" charset="-120"/>
+              </a:rPr>
+              <a:t>副歌</a:t>
+            </a:r>
+            <a:r>
+              <a:rPr lang="en-US" sz="3733" b="1" dirty="0">
+                <a:solidFill>
+                  <a:srgbClr val="000066"/>
+                </a:solidFill>
+                <a:latin typeface="Microsoft JhengHei" panose="020B0604030504040204" pitchFamily="34" charset="-120"/>
+                <a:ea typeface="Microsoft JhengHei" panose="020B0604030504040204" pitchFamily="34" charset="-120"/>
+              </a:rPr>
+              <a:t> )</a:t>
+            </a:r>
+            <a:endParaRPr lang="vi-VN" sz="3733" b="1" dirty="0">
+              <a:solidFill>
+                <a:srgbClr val="000066"/>
+              </a:solidFill>
+              <a:ea typeface="Microsoft JhengHei" panose="020B0604030504040204" pitchFamily="34" charset="-120"/>
+            </a:endParaRPr>
+          </a:p>
+        </p:txBody>
+      </p:sp>
+    </p:spTree>
+    <p:extLst>
+      <p:ext uri="{BB962C8B-B14F-4D97-AF65-F5344CB8AC3E}">
+        <p14:creationId xmlns:p14="http://schemas.microsoft.com/office/powerpoint/2010/main" val="1936232662"/>
+      </p:ext>
+    </p:extLst>
+  </p:cSld>
+  <p:clrMapOvr>
+    <a:masterClrMapping/>
+  </p:clrMapOvr>
+</p:sld>
+</file>
+
+<file path=ppt/slides/slide6.xml><?xml version="1.0" encoding="utf-8"?>
+<p:sld xmlns:a="http://schemas.openxmlformats.org/drawingml/2006/main" xmlns:r="http://schemas.openxmlformats.org/officeDocument/2006/relationships" xmlns:p="http://schemas.openxmlformats.org/presentationml/2006/main">
+  <p:cSld>
+    <p:spTree>
+      <p:nvGrpSpPr>
+        <p:cNvPr id="1" name=""/>
+        <p:cNvGrpSpPr/>
+        <p:nvPr/>
+      </p:nvGrpSpPr>
+      <p:grpSpPr>
+        <a:xfrm>
+          <a:off x="0" y="0"/>
+          <a:ext cx="0" cy="0"/>
+          <a:chOff x="0" y="0"/>
+          <a:chExt cx="0" cy="0"/>
+        </a:xfrm>
+      </p:grpSpPr>
+      <p:sp>
+        <p:nvSpPr>
+          <p:cNvPr id="5" name="內容版面配置區 4"/>
+          <p:cNvSpPr>
+            <a:spLocks noGrp="1"/>
+          </p:cNvSpPr>
+          <p:nvPr>
+            <p:ph idx="1"/>
+          </p:nvPr>
+        </p:nvSpPr>
+        <p:spPr>
+          <a:xfrm>
+            <a:off x="0" y="2084851"/>
+            <a:ext cx="12192000" cy="2404863"/>
+          </a:xfrm>
+        </p:spPr>
+        <p:txBody>
+          <a:bodyPr anchor="ctr">
+            <a:normAutofit/>
+          </a:bodyPr>
+          <a:lstStyle/>
+          <a:p>
+            <a:pPr algn="ctr">
+              <a:buNone/>
+            </a:pPr>
+            <a:r>
+              <a:rPr lang="zh-CN" altLang="en-US" sz="6600" b="1" dirty="0">
+                <a:solidFill>
+                  <a:srgbClr val="000066"/>
+                </a:solidFill>
+                <a:latin typeface="微軟正黑體" pitchFamily="34" charset="-120"/>
+                <a:ea typeface="微軟正黑體" pitchFamily="34" charset="-120"/>
+              </a:rPr>
+              <a:t>我要順服  因為我愛祢</a:t>
+            </a:r>
+            <a:endParaRPr lang="en-US" altLang="zh-CN" sz="6600" b="1" dirty="0">
+              <a:solidFill>
+                <a:srgbClr val="000066"/>
+              </a:solidFill>
+              <a:latin typeface="微軟正黑體" pitchFamily="34" charset="-120"/>
+              <a:ea typeface="微軟正黑體" pitchFamily="34" charset="-120"/>
+            </a:endParaRPr>
+          </a:p>
+          <a:p>
+            <a:pPr algn="ctr">
+              <a:buNone/>
+            </a:pPr>
+            <a:r>
+              <a:rPr lang="zh-CN" altLang="en-US" sz="6600" b="1" dirty="0">
+                <a:solidFill>
+                  <a:srgbClr val="000066"/>
+                </a:solidFill>
+                <a:latin typeface="微軟正黑體" pitchFamily="34" charset="-120"/>
+                <a:ea typeface="微軟正黑體" pitchFamily="34" charset="-120"/>
+              </a:rPr>
+              <a:t>無論何處到哪裡都忠心</a:t>
+            </a:r>
+            <a:endParaRPr lang="zh-TW" altLang="en-US" sz="6600" b="1" dirty="0">
+              <a:solidFill>
+                <a:srgbClr val="000066"/>
+              </a:solidFill>
+              <a:latin typeface="微軟正黑體" pitchFamily="34" charset="-120"/>
+              <a:ea typeface="微軟正黑體" pitchFamily="34" charset="-120"/>
+            </a:endParaRPr>
+          </a:p>
+        </p:txBody>
+      </p:sp>
+      <p:sp>
+        <p:nvSpPr>
+          <p:cNvPr id="3" name="TextBox 2"/>
+          <p:cNvSpPr txBox="1"/>
+          <p:nvPr/>
+        </p:nvSpPr>
+        <p:spPr>
+          <a:xfrm>
+            <a:off x="0" y="5253203"/>
+            <a:ext cx="12192000" cy="666786"/>
+          </a:xfrm>
+          <a:prstGeom prst="rect">
+            <a:avLst/>
+          </a:prstGeom>
+          <a:noFill/>
+        </p:spPr>
+        <p:txBody>
+          <a:bodyPr wrap="square" rtlCol="0">
+            <a:spAutoFit/>
+          </a:bodyPr>
+          <a:lstStyle/>
+          <a:p>
+            <a:pPr algn="ctr"/>
+            <a:r>
+              <a:rPr lang="en-US" sz="3733" b="1" dirty="0">
+                <a:solidFill>
+                  <a:srgbClr val="000066"/>
+                </a:solidFill>
+                <a:latin typeface="Microsoft JhengHei" panose="020B0604030504040204" pitchFamily="34" charset="-120"/>
+                <a:ea typeface="Microsoft JhengHei" panose="020B0604030504040204" pitchFamily="34" charset="-120"/>
+              </a:rPr>
+              <a:t>( </a:t>
+            </a:r>
+            <a:r>
+              <a:rPr lang="zh-CN" altLang="en-US" sz="3733" b="1" dirty="0">
+                <a:solidFill>
+                  <a:srgbClr val="000066"/>
+                </a:solidFill>
+                <a:latin typeface="Microsoft JhengHei" panose="020B0604030504040204" pitchFamily="34" charset="-120"/>
+                <a:ea typeface="Microsoft JhengHei" panose="020B0604030504040204" pitchFamily="34" charset="-120"/>
+              </a:rPr>
+              <a:t>副歌</a:t>
+            </a:r>
+            <a:r>
+              <a:rPr lang="en-US" sz="3733" b="1" dirty="0">
+                <a:solidFill>
+                  <a:srgbClr val="000066"/>
+                </a:solidFill>
+                <a:latin typeface="Microsoft JhengHei" panose="020B0604030504040204" pitchFamily="34" charset="-120"/>
+                <a:ea typeface="Microsoft JhengHei" panose="020B0604030504040204" pitchFamily="34" charset="-120"/>
+              </a:rPr>
+              <a:t> )</a:t>
+            </a:r>
+            <a:endParaRPr lang="vi-VN" sz="3733" b="1" dirty="0">
+              <a:solidFill>
+                <a:srgbClr val="000066"/>
+              </a:solidFill>
+              <a:ea typeface="Microsoft JhengHei" panose="020B0604030504040204" pitchFamily="34" charset="-120"/>
+            </a:endParaRPr>
+          </a:p>
+        </p:txBody>
+      </p:sp>
+    </p:spTree>
+    <p:extLst>
+      <p:ext uri="{BB962C8B-B14F-4D97-AF65-F5344CB8AC3E}">
+        <p14:creationId xmlns:p14="http://schemas.microsoft.com/office/powerpoint/2010/main" val="1132331553"/>
+      </p:ext>
+    </p:extLst>
+  </p:cSld>
+  <p:clrMapOvr>
+    <a:masterClrMapping/>
+  </p:clrMapOvr>
+</p:sld>
+</file>
+
+<file path=ppt/slides/slide7.xml><?xml version="1.0" encoding="utf-8"?>
+<p:sld xmlns:a="http://schemas.openxmlformats.org/drawingml/2006/main" xmlns:r="http://schemas.openxmlformats.org/officeDocument/2006/relationships" xmlns:p="http://schemas.openxmlformats.org/presentationml/2006/main">
+  <p:cSld>
+    <p:spTree>
+      <p:nvGrpSpPr>
+        <p:cNvPr id="1" name=""/>
+        <p:cNvGrpSpPr/>
+        <p:nvPr/>
+      </p:nvGrpSpPr>
+      <p:grpSpPr>
+        <a:xfrm>
+          <a:off x="0" y="0"/>
+          <a:ext cx="0" cy="0"/>
+          <a:chOff x="0" y="0"/>
+          <a:chExt cx="0" cy="0"/>
+        </a:xfrm>
+      </p:grpSpPr>
+      <p:sp>
+        <p:nvSpPr>
+          <p:cNvPr id="5" name="內容版面配置區 4"/>
+          <p:cNvSpPr>
+            <a:spLocks noGrp="1"/>
+          </p:cNvSpPr>
+          <p:nvPr>
+            <p:ph idx="1"/>
+          </p:nvPr>
+        </p:nvSpPr>
+        <p:spPr>
+          <a:xfrm>
+            <a:off x="0" y="2084851"/>
+            <a:ext cx="12192000" cy="2404863"/>
+          </a:xfrm>
+        </p:spPr>
+        <p:txBody>
+          <a:bodyPr anchor="ctr">
+            <a:normAutofit/>
+          </a:bodyPr>
+          <a:lstStyle/>
+          <a:p>
+            <a:pPr algn="ctr">
+              <a:buNone/>
+            </a:pPr>
+            <a:r>
+              <a:rPr lang="zh-CN" altLang="en-US" sz="6600" b="1" dirty="0">
+                <a:solidFill>
+                  <a:srgbClr val="000066"/>
                 </a:solidFill>
                 <a:latin typeface="微軟正黑體" pitchFamily="34" charset="-120"/>
                 <a:ea typeface="微軟正黑體" pitchFamily="34" charset="-120"/>
               </a:rPr>
               <a:t>一生活出基督福音的託付</a:t>
             </a:r>
-            <a:endParaRPr lang="en-US" altLang="zh-CN" sz="5400" b="1" dirty="0">
+            <a:endParaRPr lang="en-US" altLang="zh-CN" sz="6600" b="1" dirty="0">
               <a:solidFill>
-                <a:srgbClr val="002060"/>
+                <a:srgbClr val="000066"/>
               </a:solidFill>
               <a:latin typeface="微軟正黑體" pitchFamily="34" charset="-120"/>
               <a:ea typeface="微軟正黑體" pitchFamily="34" charset="-120"/>
@@ -3592,18 +3979,18 @@
               <a:buNone/>
             </a:pPr>
             <a:r>
-              <a:rPr lang="zh-CN" altLang="en-US" sz="5400" b="1" dirty="0">
-                <a:solidFill>
-                  <a:srgbClr val="002060"/>
+              <a:rPr lang="zh-CN" altLang="en-US" sz="6600" b="1" dirty="0">
+                <a:solidFill>
+                  <a:srgbClr val="000066"/>
                 </a:solidFill>
                 <a:latin typeface="微軟正黑體" pitchFamily="34" charset="-120"/>
                 <a:ea typeface="微軟正黑體" pitchFamily="34" charset="-120"/>
               </a:rPr>
               <a:t>獻給耶穌我所有的全部</a:t>
             </a:r>
-            <a:endParaRPr lang="zh-TW" altLang="en-US" sz="5400" b="1" dirty="0">
+            <a:endParaRPr lang="zh-TW" altLang="en-US" sz="6600" b="1" dirty="0">
               <a:solidFill>
-                <a:srgbClr val="002060"/>
+                <a:srgbClr val="000066"/>
               </a:solidFill>
               <a:latin typeface="微軟正黑體" pitchFamily="34" charset="-120"/>
               <a:ea typeface="微軟正黑體" pitchFamily="34" charset="-120"/>
@@ -3611,7 +3998,74 @@
           </a:p>
         </p:txBody>
       </p:sp>
+      <p:sp>
+        <p:nvSpPr>
+          <p:cNvPr id="3" name="TextBox 2"/>
+          <p:cNvSpPr txBox="1"/>
+          <p:nvPr/>
+        </p:nvSpPr>
+        <p:spPr>
+          <a:xfrm>
+            <a:off x="0" y="5253203"/>
+            <a:ext cx="12192000" cy="666786"/>
+          </a:xfrm>
+          <a:prstGeom prst="rect">
+            <a:avLst/>
+          </a:prstGeom>
+          <a:noFill/>
+        </p:spPr>
+        <p:txBody>
+          <a:bodyPr wrap="square" rtlCol="0">
+            <a:spAutoFit/>
+          </a:bodyPr>
+          <a:lstStyle/>
+          <a:p>
+            <a:pPr algn="ctr"/>
+            <a:r>
+              <a:rPr lang="en-US" sz="3733" b="1" dirty="0">
+                <a:solidFill>
+                  <a:srgbClr val="000066"/>
+                </a:solidFill>
+                <a:latin typeface="Microsoft JhengHei" panose="020B0604030504040204" pitchFamily="34" charset="-120"/>
+                <a:ea typeface="Microsoft JhengHei" panose="020B0604030504040204" pitchFamily="34" charset="-120"/>
+              </a:rPr>
+              <a:t>( </a:t>
+            </a:r>
+            <a:r>
+              <a:rPr lang="zh-CN" altLang="en-US" sz="3733" b="1" dirty="0">
+                <a:solidFill>
+                  <a:srgbClr val="000066"/>
+                </a:solidFill>
+                <a:latin typeface="Microsoft JhengHei" panose="020B0604030504040204" pitchFamily="34" charset="-120"/>
+                <a:ea typeface="Microsoft JhengHei" panose="020B0604030504040204" pitchFamily="34" charset="-120"/>
+              </a:rPr>
+              <a:t>副歌</a:t>
+            </a:r>
+            <a:r>
+              <a:rPr lang="en-US" sz="3733" b="1" dirty="0">
+                <a:solidFill>
+                  <a:srgbClr val="000066"/>
+                </a:solidFill>
+                <a:latin typeface="Microsoft JhengHei" panose="020B0604030504040204" pitchFamily="34" charset="-120"/>
+                <a:ea typeface="Microsoft JhengHei" panose="020B0604030504040204" pitchFamily="34" charset="-120"/>
+              </a:rPr>
+              <a:t> )</a:t>
+            </a:r>
+            <a:endParaRPr lang="vi-VN" sz="3733" b="1" dirty="0">
+              <a:solidFill>
+                <a:srgbClr val="000066"/>
+              </a:solidFill>
+              <a:ea typeface="Microsoft JhengHei" panose="020B0604030504040204" pitchFamily="34" charset="-120"/>
+            </a:endParaRPr>
+          </a:p>
+        </p:txBody>
+      </p:sp>
     </p:spTree>
+    <p:extLst>
+      <p:ext uri="{BB962C8B-B14F-4D97-AF65-F5344CB8AC3E}">
+        <p14:creationId xmlns:p14="http://schemas.microsoft.com/office/powerpoint/2010/main" val="2020249184"/>
+      </p:ext>
+    </p:extLst>
   </p:cSld>
   <p:clrMapOvr>
     <a:masterClrMapping/>
